--- a/Analysis of Us Rental Market.pptx
+++ b/Analysis of Us Rental Market.pptx
@@ -209,7 +209,7 @@
           <a:p>
             <a:fld id="{D813B696-7300-B942-95CD-6BA9CF4A8F92}" type="datetimeFigureOut">
               <a:rPr lang="en-US" smtClean="0"/>
-              <a:t>8/19/24</a:t>
+              <a:t>3/2/26</a:t>
             </a:fld>
             <a:endParaRPr lang="en-US"/>
           </a:p>
@@ -623,7 +623,7 @@
             </a:pPr>
             <a:r>
               <a:rPr lang="en-US" dirty="0"/>
-              <a:t>Sports amenities include: </a:t>
+              <a:t xml:space="preserve">Sports amenities include: </a:t>
             </a:r>
             <a:r>
               <a:rPr lang="en-US" b="0" dirty="0">
@@ -643,7 +643,7 @@
                 <a:effectLst/>
                 <a:latin typeface="Courier New" panose="02070309020205020404" pitchFamily="49" charset="0"/>
               </a:rPr>
-              <a:t>, </a:t>
+              <a:t xml:space="preserve">, </a:t>
             </a:r>
             <a:r>
               <a:rPr lang="en-US" b="0" dirty="0">
@@ -663,7 +663,7 @@
                 <a:effectLst/>
                 <a:latin typeface="Courier New" panose="02070309020205020404" pitchFamily="49" charset="0"/>
               </a:rPr>
-              <a:t>, </a:t>
+              <a:t xml:space="preserve">, </a:t>
             </a:r>
             <a:r>
               <a:rPr lang="en-US" b="0" dirty="0">
@@ -683,7 +683,7 @@
                 <a:effectLst/>
                 <a:latin typeface="Courier New" panose="02070309020205020404" pitchFamily="49" charset="0"/>
               </a:rPr>
-              <a:t>, </a:t>
+              <a:t xml:space="preserve">, </a:t>
             </a:r>
             <a:r>
               <a:rPr lang="en-US" b="0" dirty="0">
@@ -703,7 +703,7 @@
                 <a:effectLst/>
                 <a:latin typeface="Courier New" panose="02070309020205020404" pitchFamily="49" charset="0"/>
               </a:rPr>
-              <a:t>, </a:t>
+              <a:t xml:space="preserve">, </a:t>
             </a:r>
             <a:r>
               <a:rPr lang="en-US" b="0" dirty="0">
@@ -752,7 +752,7 @@
                 <a:effectLst/>
                 <a:latin typeface="Courier New" panose="02070309020205020404" pitchFamily="49" charset="0"/>
               </a:rPr>
-              <a:t>, </a:t>
+              <a:t xml:space="preserve">, </a:t>
             </a:r>
             <a:r>
               <a:rPr lang="en-US" b="0" dirty="0">
@@ -772,7 +772,7 @@
                 <a:effectLst/>
                 <a:latin typeface="Courier New" panose="02070309020205020404" pitchFamily="49" charset="0"/>
               </a:rPr>
-              <a:t>, </a:t>
+              <a:t xml:space="preserve">, </a:t>
             </a:r>
             <a:r>
               <a:rPr lang="en-US" b="0" dirty="0">
@@ -811,7 +811,7 @@
                 <a:effectLst/>
                 <a:latin typeface="Courier New" panose="02070309020205020404" pitchFamily="49" charset="0"/>
               </a:rPr>
-              <a:t>Convenience </a:t>
+              <a:t xml:space="preserve">Convenience </a:t>
             </a:r>
             <a:r>
               <a:rPr lang="en-US" b="0" dirty="0">
@@ -831,7 +831,7 @@
                 <a:effectLst/>
                 <a:latin typeface="Courier New" panose="02070309020205020404" pitchFamily="49" charset="0"/>
               </a:rPr>
-              <a:t>, </a:t>
+              <a:t xml:space="preserve">, </a:t>
             </a:r>
             <a:r>
               <a:rPr lang="en-US" b="0" dirty="0">
@@ -851,7 +851,7 @@
                 <a:effectLst/>
                 <a:latin typeface="Courier New" panose="02070309020205020404" pitchFamily="49" charset="0"/>
               </a:rPr>
-              <a:t>, </a:t>
+              <a:t xml:space="preserve">, </a:t>
             </a:r>
             <a:r>
               <a:rPr lang="en-US" b="0" dirty="0">
@@ -871,7 +871,7 @@
                 <a:effectLst/>
                 <a:latin typeface="Courier New" panose="02070309020205020404" pitchFamily="49" charset="0"/>
               </a:rPr>
-              <a:t>, </a:t>
+              <a:t xml:space="preserve">, </a:t>
             </a:r>
             <a:r>
               <a:rPr lang="en-US" b="0" dirty="0">
@@ -891,7 +891,7 @@
                 <a:effectLst/>
                 <a:latin typeface="Courier New" panose="02070309020205020404" pitchFamily="49" charset="0"/>
               </a:rPr>
-              <a:t>, </a:t>
+              <a:t xml:space="preserve">, </a:t>
             </a:r>
             <a:r>
               <a:rPr lang="en-US" b="0" dirty="0">
@@ -911,7 +911,7 @@
                 <a:effectLst/>
                 <a:latin typeface="Courier New" panose="02070309020205020404" pitchFamily="49" charset="0"/>
               </a:rPr>
-              <a:t>, </a:t>
+              <a:t xml:space="preserve">, </a:t>
             </a:r>
             <a:r>
               <a:rPr lang="en-US" b="0" dirty="0">
@@ -931,7 +931,7 @@
                 <a:effectLst/>
                 <a:latin typeface="Courier New" panose="02070309020205020404" pitchFamily="49" charset="0"/>
               </a:rPr>
-              <a:t>, </a:t>
+              <a:t xml:space="preserve">, </a:t>
             </a:r>
             <a:r>
               <a:rPr lang="en-US" b="0" dirty="0">
@@ -951,7 +951,7 @@
                 <a:effectLst/>
                 <a:latin typeface="Courier New" panose="02070309020205020404" pitchFamily="49" charset="0"/>
               </a:rPr>
-              <a:t>, </a:t>
+              <a:t xml:space="preserve">, </a:t>
             </a:r>
             <a:r>
               <a:rPr lang="en-US" b="0" dirty="0">
@@ -971,7 +971,7 @@
                 <a:effectLst/>
                 <a:latin typeface="Courier New" panose="02070309020205020404" pitchFamily="49" charset="0"/>
               </a:rPr>
-              <a:t>, </a:t>
+              <a:t xml:space="preserve">, </a:t>
             </a:r>
             <a:r>
               <a:rPr lang="en-US" b="0" dirty="0" err="1">
@@ -1011,7 +1011,7 @@
                 <a:effectLst/>
                 <a:latin typeface="Courier New" panose="02070309020205020404" pitchFamily="49" charset="0"/>
               </a:rPr>
-              <a:t> or </a:t>
+              <a:t xml:space="preserve"> or </a:t>
             </a:r>
             <a:r>
               <a:rPr lang="en-US" b="0" dirty="0" err="1">
@@ -1051,7 +1051,7 @@
                 <a:effectLst/>
                 <a:latin typeface="Courier New" panose="02070309020205020404" pitchFamily="49" charset="0"/>
               </a:rPr>
-              <a:t> Access</a:t>
+              <a:t xml:space="preserve"> Access</a:t>
             </a:r>
           </a:p>
           <a:p>
@@ -1090,7 +1090,7 @@
                 <a:effectLst/>
                 <a:latin typeface="Courier New" panose="02070309020205020404" pitchFamily="49" charset="0"/>
               </a:rPr>
-              <a:t>, </a:t>
+              <a:t xml:space="preserve">, </a:t>
             </a:r>
             <a:r>
               <a:rPr lang="en-US" b="0" dirty="0">
@@ -1110,7 +1110,7 @@
                 <a:effectLst/>
                 <a:latin typeface="Courier New" panose="02070309020205020404" pitchFamily="49" charset="0"/>
               </a:rPr>
-              <a:t>, </a:t>
+              <a:t xml:space="preserve">, </a:t>
             </a:r>
             <a:r>
               <a:rPr lang="en-US" b="0" dirty="0">
@@ -1130,7 +1130,7 @@
                 <a:effectLst/>
                 <a:latin typeface="Courier New" panose="02070309020205020404" pitchFamily="49" charset="0"/>
               </a:rPr>
-              <a:t>, </a:t>
+              <a:t xml:space="preserve">, </a:t>
             </a:r>
             <a:r>
               <a:rPr lang="en-US" b="0" dirty="0">
@@ -1150,7 +1150,7 @@
                 <a:effectLst/>
                 <a:latin typeface="Courier New" panose="02070309020205020404" pitchFamily="49" charset="0"/>
               </a:rPr>
-              <a:t>, </a:t>
+              <a:t xml:space="preserve">, </a:t>
             </a:r>
             <a:r>
               <a:rPr lang="en-US" b="0" dirty="0">
@@ -1170,7 +1170,7 @@
                 <a:effectLst/>
                 <a:latin typeface="Courier New" panose="02070309020205020404" pitchFamily="49" charset="0"/>
               </a:rPr>
-              <a:t>, </a:t>
+              <a:t xml:space="preserve">, </a:t>
             </a:r>
             <a:r>
               <a:rPr lang="en-US" b="0" dirty="0">
@@ -1424,7 +1424,7 @@
             </a:pPr>
             <a:r>
               <a:rPr lang="en-US" dirty="0"/>
-              <a:t>Sports amenities include: </a:t>
+              <a:t xml:space="preserve">Sports amenities include: </a:t>
             </a:r>
             <a:r>
               <a:rPr lang="en-US" b="0" dirty="0">
@@ -1444,7 +1444,7 @@
                 <a:effectLst/>
                 <a:latin typeface="Courier New" panose="02070309020205020404" pitchFamily="49" charset="0"/>
               </a:rPr>
-              <a:t>, </a:t>
+              <a:t xml:space="preserve">, </a:t>
             </a:r>
             <a:r>
               <a:rPr lang="en-US" b="0" dirty="0">
@@ -1464,7 +1464,7 @@
                 <a:effectLst/>
                 <a:latin typeface="Courier New" panose="02070309020205020404" pitchFamily="49" charset="0"/>
               </a:rPr>
-              <a:t>, </a:t>
+              <a:t xml:space="preserve">, </a:t>
             </a:r>
             <a:r>
               <a:rPr lang="en-US" b="0" dirty="0">
@@ -1484,7 +1484,7 @@
                 <a:effectLst/>
                 <a:latin typeface="Courier New" panose="02070309020205020404" pitchFamily="49" charset="0"/>
               </a:rPr>
-              <a:t>, </a:t>
+              <a:t xml:space="preserve">, </a:t>
             </a:r>
             <a:r>
               <a:rPr lang="en-US" b="0" dirty="0">
@@ -1504,7 +1504,7 @@
                 <a:effectLst/>
                 <a:latin typeface="Courier New" panose="02070309020205020404" pitchFamily="49" charset="0"/>
               </a:rPr>
-              <a:t>, </a:t>
+              <a:t xml:space="preserve">, </a:t>
             </a:r>
             <a:r>
               <a:rPr lang="en-US" b="0" dirty="0">
@@ -1553,7 +1553,7 @@
                 <a:effectLst/>
                 <a:latin typeface="Courier New" panose="02070309020205020404" pitchFamily="49" charset="0"/>
               </a:rPr>
-              <a:t>, </a:t>
+              <a:t xml:space="preserve">, </a:t>
             </a:r>
             <a:r>
               <a:rPr lang="en-US" b="0" dirty="0">
@@ -1573,7 +1573,7 @@
                 <a:effectLst/>
                 <a:latin typeface="Courier New" panose="02070309020205020404" pitchFamily="49" charset="0"/>
               </a:rPr>
-              <a:t>, </a:t>
+              <a:t xml:space="preserve">, </a:t>
             </a:r>
             <a:r>
               <a:rPr lang="en-US" b="0" dirty="0">
@@ -1612,7 +1612,7 @@
                 <a:effectLst/>
                 <a:latin typeface="Courier New" panose="02070309020205020404" pitchFamily="49" charset="0"/>
               </a:rPr>
-              <a:t>Convenience </a:t>
+              <a:t xml:space="preserve">Convenience </a:t>
             </a:r>
             <a:r>
               <a:rPr lang="en-US" b="0" dirty="0">
@@ -1632,7 +1632,7 @@
                 <a:effectLst/>
                 <a:latin typeface="Courier New" panose="02070309020205020404" pitchFamily="49" charset="0"/>
               </a:rPr>
-              <a:t>, </a:t>
+              <a:t xml:space="preserve">, </a:t>
             </a:r>
             <a:r>
               <a:rPr lang="en-US" b="0" dirty="0">
@@ -1652,7 +1652,7 @@
                 <a:effectLst/>
                 <a:latin typeface="Courier New" panose="02070309020205020404" pitchFamily="49" charset="0"/>
               </a:rPr>
-              <a:t>, </a:t>
+              <a:t xml:space="preserve">, </a:t>
             </a:r>
             <a:r>
               <a:rPr lang="en-US" b="0" dirty="0">
@@ -1672,7 +1672,7 @@
                 <a:effectLst/>
                 <a:latin typeface="Courier New" panose="02070309020205020404" pitchFamily="49" charset="0"/>
               </a:rPr>
-              <a:t>, </a:t>
+              <a:t xml:space="preserve">, </a:t>
             </a:r>
             <a:r>
               <a:rPr lang="en-US" b="0" dirty="0">
@@ -1692,7 +1692,7 @@
                 <a:effectLst/>
                 <a:latin typeface="Courier New" panose="02070309020205020404" pitchFamily="49" charset="0"/>
               </a:rPr>
-              <a:t>, </a:t>
+              <a:t xml:space="preserve">, </a:t>
             </a:r>
             <a:r>
               <a:rPr lang="en-US" b="0" dirty="0">
@@ -1712,7 +1712,7 @@
                 <a:effectLst/>
                 <a:latin typeface="Courier New" panose="02070309020205020404" pitchFamily="49" charset="0"/>
               </a:rPr>
-              <a:t>, </a:t>
+              <a:t xml:space="preserve">, </a:t>
             </a:r>
             <a:r>
               <a:rPr lang="en-US" b="0" dirty="0">
@@ -1732,7 +1732,7 @@
                 <a:effectLst/>
                 <a:latin typeface="Courier New" panose="02070309020205020404" pitchFamily="49" charset="0"/>
               </a:rPr>
-              <a:t>, </a:t>
+              <a:t xml:space="preserve">, </a:t>
             </a:r>
             <a:r>
               <a:rPr lang="en-US" b="0" dirty="0">
@@ -1752,7 +1752,7 @@
                 <a:effectLst/>
                 <a:latin typeface="Courier New" panose="02070309020205020404" pitchFamily="49" charset="0"/>
               </a:rPr>
-              <a:t>, </a:t>
+              <a:t xml:space="preserve">, </a:t>
             </a:r>
             <a:r>
               <a:rPr lang="en-US" b="0" dirty="0">
@@ -1772,7 +1772,7 @@
                 <a:effectLst/>
                 <a:latin typeface="Courier New" panose="02070309020205020404" pitchFamily="49" charset="0"/>
               </a:rPr>
-              <a:t>, </a:t>
+              <a:t xml:space="preserve">, </a:t>
             </a:r>
             <a:r>
               <a:rPr lang="en-US" b="0" dirty="0" err="1">
@@ -1812,7 +1812,7 @@
                 <a:effectLst/>
                 <a:latin typeface="Courier New" panose="02070309020205020404" pitchFamily="49" charset="0"/>
               </a:rPr>
-              <a:t> or </a:t>
+              <a:t xml:space="preserve"> or </a:t>
             </a:r>
             <a:r>
               <a:rPr lang="en-US" b="0" dirty="0" err="1">
@@ -1852,7 +1852,7 @@
                 <a:effectLst/>
                 <a:latin typeface="Courier New" panose="02070309020205020404" pitchFamily="49" charset="0"/>
               </a:rPr>
-              <a:t> Access</a:t>
+              <a:t xml:space="preserve"> Access</a:t>
             </a:r>
           </a:p>
           <a:p>
@@ -1891,7 +1891,7 @@
                 <a:effectLst/>
                 <a:latin typeface="Courier New" panose="02070309020205020404" pitchFamily="49" charset="0"/>
               </a:rPr>
-              <a:t>, </a:t>
+              <a:t xml:space="preserve">, </a:t>
             </a:r>
             <a:r>
               <a:rPr lang="en-US" b="0" dirty="0">
@@ -1911,7 +1911,7 @@
                 <a:effectLst/>
                 <a:latin typeface="Courier New" panose="02070309020205020404" pitchFamily="49" charset="0"/>
               </a:rPr>
-              <a:t>, </a:t>
+              <a:t xml:space="preserve">, </a:t>
             </a:r>
             <a:r>
               <a:rPr lang="en-US" b="0" dirty="0">
@@ -1931,7 +1931,7 @@
                 <a:effectLst/>
                 <a:latin typeface="Courier New" panose="02070309020205020404" pitchFamily="49" charset="0"/>
               </a:rPr>
-              <a:t>, </a:t>
+              <a:t xml:space="preserve">, </a:t>
             </a:r>
             <a:r>
               <a:rPr lang="en-US" b="0" dirty="0">
@@ -1951,7 +1951,7 @@
                 <a:effectLst/>
                 <a:latin typeface="Courier New" panose="02070309020205020404" pitchFamily="49" charset="0"/>
               </a:rPr>
-              <a:t>, </a:t>
+              <a:t xml:space="preserve">, </a:t>
             </a:r>
             <a:r>
               <a:rPr lang="en-US" b="0" dirty="0">
@@ -1971,7 +1971,7 @@
                 <a:effectLst/>
                 <a:latin typeface="Courier New" panose="02070309020205020404" pitchFamily="49" charset="0"/>
               </a:rPr>
-              <a:t>, </a:t>
+              <a:t xml:space="preserve">, </a:t>
             </a:r>
             <a:r>
               <a:rPr lang="en-US" b="0" dirty="0">
@@ -2301,7 +2301,7 @@
           <a:p>
             <a:fld id="{0CC58D2E-84BF-0A44-9057-4674209F9D8F}" type="datetimeFigureOut">
               <a:rPr lang="en-US" smtClean="0"/>
-              <a:t>8/19/24</a:t>
+              <a:t>3/2/26</a:t>
             </a:fld>
             <a:endParaRPr lang="en-US"/>
           </a:p>
@@ -2512,7 +2512,7 @@
           <a:p>
             <a:fld id="{0CC58D2E-84BF-0A44-9057-4674209F9D8F}" type="datetimeFigureOut">
               <a:rPr lang="en-US" smtClean="0"/>
-              <a:t>8/19/24</a:t>
+              <a:t>3/2/26</a:t>
             </a:fld>
             <a:endParaRPr lang="en-US"/>
           </a:p>
@@ -2727,7 +2727,7 @@
           <a:p>
             <a:fld id="{0CC58D2E-84BF-0A44-9057-4674209F9D8F}" type="datetimeFigureOut">
               <a:rPr lang="en-US" smtClean="0"/>
-              <a:t>8/19/24</a:t>
+              <a:t>3/2/26</a:t>
             </a:fld>
             <a:endParaRPr lang="en-US"/>
           </a:p>
@@ -2928,7 +2928,7 @@
           <a:p>
             <a:fld id="{0CC58D2E-84BF-0A44-9057-4674209F9D8F}" type="datetimeFigureOut">
               <a:rPr lang="en-US" smtClean="0"/>
-              <a:t>8/19/24</a:t>
+              <a:t>3/2/26</a:t>
             </a:fld>
             <a:endParaRPr lang="en-US"/>
           </a:p>
@@ -3207,7 +3207,7 @@
           <a:p>
             <a:fld id="{0CC58D2E-84BF-0A44-9057-4674209F9D8F}" type="datetimeFigureOut">
               <a:rPr lang="en-US" smtClean="0"/>
-              <a:t>8/19/24</a:t>
+              <a:t>3/2/26</a:t>
             </a:fld>
             <a:endParaRPr lang="en-US"/>
           </a:p>
@@ -3475,7 +3475,7 @@
           <a:p>
             <a:fld id="{0CC58D2E-84BF-0A44-9057-4674209F9D8F}" type="datetimeFigureOut">
               <a:rPr lang="en-US" smtClean="0"/>
-              <a:t>8/19/24</a:t>
+              <a:t>3/2/26</a:t>
             </a:fld>
             <a:endParaRPr lang="en-US"/>
           </a:p>
@@ -3891,7 +3891,7 @@
           <a:p>
             <a:fld id="{0CC58D2E-84BF-0A44-9057-4674209F9D8F}" type="datetimeFigureOut">
               <a:rPr lang="en-US" smtClean="0"/>
-              <a:t>8/19/24</a:t>
+              <a:t>3/2/26</a:t>
             </a:fld>
             <a:endParaRPr lang="en-US"/>
           </a:p>
@@ -4040,7 +4040,7 @@
           <a:p>
             <a:fld id="{0CC58D2E-84BF-0A44-9057-4674209F9D8F}" type="datetimeFigureOut">
               <a:rPr lang="en-US" smtClean="0"/>
-              <a:t>8/19/24</a:t>
+              <a:t>3/2/26</a:t>
             </a:fld>
             <a:endParaRPr lang="en-US"/>
           </a:p>
@@ -4166,7 +4166,7 @@
           <a:p>
             <a:fld id="{0CC58D2E-84BF-0A44-9057-4674209F9D8F}" type="datetimeFigureOut">
               <a:rPr lang="en-US" smtClean="0"/>
-              <a:t>8/19/24</a:t>
+              <a:t>3/2/26</a:t>
             </a:fld>
             <a:endParaRPr lang="en-US"/>
           </a:p>
@@ -4417,7 +4417,7 @@
           <a:p>
             <a:fld id="{0CC58D2E-84BF-0A44-9057-4674209F9D8F}" type="datetimeFigureOut">
               <a:rPr lang="en-US" smtClean="0"/>
-              <a:t>8/19/24</a:t>
+              <a:t>3/2/26</a:t>
             </a:fld>
             <a:endParaRPr lang="en-US"/>
           </a:p>
@@ -4862,7 +4862,7 @@
           <a:p>
             <a:fld id="{0CC58D2E-84BF-0A44-9057-4674209F9D8F}" type="datetimeFigureOut">
               <a:rPr lang="en-US" smtClean="0"/>
-              <a:t>8/19/24</a:t>
+              <a:t>3/2/26</a:t>
             </a:fld>
             <a:endParaRPr lang="en-US"/>
           </a:p>
@@ -5029,6 +5029,13 @@
             <a:schemeClr val="lt1"/>
           </a:fontRef>
         </p:style>
+        <p:txBody>
+          <a:bodyPr/>
+          <a:lstStyle/>
+          <a:p>
+            <a:endParaRPr lang="en-US"/>
+          </a:p>
+        </p:txBody>
       </p:sp>
       <p:pic>
         <p:nvPicPr>
@@ -5189,7 +5196,7 @@
           <a:p>
             <a:fld id="{0CC58D2E-84BF-0A44-9057-4674209F9D8F}" type="datetimeFigureOut">
               <a:rPr lang="en-US" smtClean="0"/>
-              <a:t>8/19/24</a:t>
+              <a:t>3/2/26</a:t>
             </a:fld>
             <a:endParaRPr lang="en-US"/>
           </a:p>
@@ -5705,7 +5712,7 @@
           <a:p>
             <a:r>
               <a:rPr lang="en-US" sz="3200" dirty="0"/>
-              <a:t> Analysis of the U.S. Apartment Rental Market: Identifying Key Segments and Characteristics</a:t>
+              <a:t xml:space="preserve"> Analysis of the U.S. Apartment Rental Market: Identifying Key Segments and Characteristics</a:t>
             </a:r>
           </a:p>
         </p:txBody>
@@ -5794,7 +5801,7 @@
       </p:grpSpPr>
       <p:sp>
         <p:nvSpPr>
-          <p:cNvPr id="61" name="Rectangle 60">
+          <p:cNvPr id="101" name="Rectangle 100">
             <a:extLst>
               <a:ext uri="{FF2B5EF4-FFF2-40B4-BE49-F238E27FC236}">
                 <a16:creationId xmlns:a16="http://schemas.microsoft.com/office/drawing/2014/main" id="{1CE580D1-F917-4567-AFB4-99AA9B52ADF0}"/>
@@ -5867,7 +5874,7 @@
       </p:sp>
       <p:pic>
         <p:nvPicPr>
-          <p:cNvPr id="62" name="Picture 61">
+          <p:cNvPr id="103" name="Picture 102">
             <a:extLst>
               <a:ext uri="{FF2B5EF4-FFF2-40B4-BE49-F238E27FC236}">
                 <a16:creationId xmlns:a16="http://schemas.microsoft.com/office/drawing/2014/main" id="{1F5620B8-A2D8-4568-B566-F0453A0D9167}"/>
@@ -5911,7 +5918,7 @@
       </p:pic>
       <p:cxnSp>
         <p:nvCxnSpPr>
-          <p:cNvPr id="63" name="Straight Connector 62">
+          <p:cNvPr id="105" name="Straight Connector 104">
             <a:extLst>
               <a:ext uri="{FF2B5EF4-FFF2-40B4-BE49-F238E27FC236}">
                 <a16:creationId xmlns:a16="http://schemas.microsoft.com/office/drawing/2014/main" id="{1C7D2BA4-4B7A-4596-8BCC-5CF715423894}"/>
@@ -5965,7 +5972,7 @@
       </p:cxnSp>
       <p:cxnSp>
         <p:nvCxnSpPr>
-          <p:cNvPr id="64" name="Straight Connector 63">
+          <p:cNvPr id="107" name="Straight Connector 106">
             <a:extLst>
               <a:ext uri="{FF2B5EF4-FFF2-40B4-BE49-F238E27FC236}">
                 <a16:creationId xmlns:a16="http://schemas.microsoft.com/office/drawing/2014/main" id="{4977F1E1-2B6F-4BB6-899F-67D8764D83C5}"/>
@@ -6013,7 +6020,7 @@
       </p:cxnSp>
       <p:sp useBgFill="1">
         <p:nvSpPr>
-          <p:cNvPr id="65" name="Rectangle 64">
+          <p:cNvPr id="109" name="Rectangle 108">
             <a:extLst>
               <a:ext uri="{FF2B5EF4-FFF2-40B4-BE49-F238E27FC236}">
                 <a16:creationId xmlns:a16="http://schemas.microsoft.com/office/drawing/2014/main" id="{EC17D08F-2133-44A9-B28C-CB29928FA8D9}"/>
@@ -6073,7 +6080,7 @@
       </p:sp>
       <p:sp>
         <p:nvSpPr>
-          <p:cNvPr id="66" name="Rectangle 65">
+          <p:cNvPr id="111" name="Rectangle 110">
             <a:extLst>
               <a:ext uri="{FF2B5EF4-FFF2-40B4-BE49-F238E27FC236}">
                 <a16:creationId xmlns:a16="http://schemas.microsoft.com/office/drawing/2014/main" id="{0CC36881-E309-4C41-8B5B-203AADC15FF6}"/>
@@ -6220,15 +6227,23 @@
               <a:buSzPct val="100000"/>
             </a:pPr>
             <a:r>
+              <a:rPr lang="en-US" sz="1600" cap="all" dirty="0"/>
+              <a:t>https://ellac12345.github.io/</a:t>
+            </a:r>
+            <a:r>
               <a:rPr lang="en-US" sz="1600" cap="all"/>
-              <a:t>https://ellac12345.github.io/US_Rental_Market/</a:t>
+              <a:t>US_Rental_Market</a:t>
+            </a:r>
+            <a:r>
+              <a:rPr lang="en-US" sz="1600" cap="all" dirty="0"/>
+              <a:t>/</a:t>
             </a:r>
           </a:p>
         </p:txBody>
       </p:sp>
       <p:cxnSp>
         <p:nvCxnSpPr>
-          <p:cNvPr id="67" name="Straight Connector 66">
+          <p:cNvPr id="113" name="Straight Connector 112">
             <a:extLst>
               <a:ext uri="{FF2B5EF4-FFF2-40B4-BE49-F238E27FC236}">
                 <a16:creationId xmlns:a16="http://schemas.microsoft.com/office/drawing/2014/main" id="{84F2C6A8-7D46-49EA-860B-0F0B0208436C}"/>
@@ -6276,7 +6291,7 @@
       </p:cxnSp>
       <p:grpSp>
         <p:nvGrpSpPr>
-          <p:cNvPr id="68" name="Group 67">
+          <p:cNvPr id="115" name="Group 114">
             <a:extLst>
               <a:ext uri="{FF2B5EF4-FFF2-40B4-BE49-F238E27FC236}">
                 <a16:creationId xmlns:a16="http://schemas.microsoft.com/office/drawing/2014/main" id="{AED92372-F778-4E96-9E90-4E63BAF3CAD3}"/>
@@ -6307,7 +6322,7 @@
         </p:grpSpPr>
         <p:sp>
           <p:nvSpPr>
-            <p:cNvPr id="54" name="Rectangle 53">
+            <p:cNvPr id="116" name="Rectangle 115">
               <a:extLst>
                 <a:ext uri="{FF2B5EF4-FFF2-40B4-BE49-F238E27FC236}">
                   <a16:creationId xmlns:a16="http://schemas.microsoft.com/office/drawing/2014/main" id="{EB4EC089-8B60-43F4-9BF5-1F0B0E398E27}"/>
@@ -6388,7 +6403,7 @@
         </p:sp>
         <p:sp>
           <p:nvSpPr>
-            <p:cNvPr id="69" name="Rectangle 68">
+            <p:cNvPr id="117" name="Rectangle 116">
               <a:extLst>
                 <a:ext uri="{FF2B5EF4-FFF2-40B4-BE49-F238E27FC236}">
                   <a16:creationId xmlns:a16="http://schemas.microsoft.com/office/drawing/2014/main" id="{1C0BAC91-1725-4E5A-92CE-F5A2EB0661A8}"/>
@@ -6473,10 +6488,10 @@
       </p:grpSp>
       <p:pic>
         <p:nvPicPr>
-          <p:cNvPr id="8" name="Picture 7">
+          <p:cNvPr id="7" name="Picture 6">
             <a:extLst>
               <a:ext uri="{FF2B5EF4-FFF2-40B4-BE49-F238E27FC236}">
-                <a16:creationId xmlns:a16="http://schemas.microsoft.com/office/drawing/2014/main" id="{58E01373-A921-19DC-5BB5-EAFCFAB0C52E}"/>
+                <a16:creationId xmlns:a16="http://schemas.microsoft.com/office/drawing/2014/main" id="{501E4170-A488-42AF-B481-A98058F0B712}"/>
               </a:ext>
             </a:extLst>
           </p:cNvPr>
@@ -6487,8 +6502,10 @@
         </p:nvPicPr>
         <p:blipFill>
           <a:blip r:embed="rId4"/>
-          <a:srcRect t="349" r="-2" b="-2"/>
-          <a:stretch/>
+          <a:srcRect t="4219" r="-2" b="1110"/>
+          <a:stretch>
+            <a:fillRect/>
+          </a:stretch>
         </p:blipFill>
         <p:spPr>
           <a:xfrm>
@@ -6502,7 +6519,7 @@
       </p:pic>
       <p:pic>
         <p:nvPicPr>
-          <p:cNvPr id="70" name="Picture 69">
+          <p:cNvPr id="119" name="Picture 118">
             <a:extLst>
               <a:ext uri="{FF2B5EF4-FFF2-40B4-BE49-F238E27FC236}">
                 <a16:creationId xmlns:a16="http://schemas.microsoft.com/office/drawing/2014/main" id="{4B61EBEC-D0CA-456C-98A6-EDA1AC9FB0D6}"/>
@@ -6546,7 +6563,7 @@
       </p:pic>
       <p:cxnSp>
         <p:nvCxnSpPr>
-          <p:cNvPr id="71" name="Straight Connector 70">
+          <p:cNvPr id="121" name="Straight Connector 120">
             <a:extLst>
               <a:ext uri="{FF2B5EF4-FFF2-40B4-BE49-F238E27FC236}">
                 <a16:creationId xmlns:a16="http://schemas.microsoft.com/office/drawing/2014/main" id="{718A71EB-D327-4458-85FB-26336B2BA01B}"/>
@@ -6743,15 +6760,15 @@
           <a:p>
             <a:r>
               <a:rPr lang="en-US" sz="3200" dirty="0"/>
-              <a:t>Results </a:t>
+              <a:t xml:space="preserve">Results </a:t>
             </a:r>
             <a:r>
               <a:rPr lang="en-US" sz="2000" dirty="0"/>
-              <a:t>cont’d    </a:t>
+              <a:t xml:space="preserve">cont’d :   </a:t>
             </a:r>
             <a:r>
               <a:rPr lang="en-US" sz="3600" dirty="0"/>
-              <a:t>CLUSTER 1 ANALYSIS </a:t>
+              <a:t>Cluster 0: Essential Rentals Analysis</a:t>
             </a:r>
           </a:p>
         </p:txBody>
@@ -6793,7 +6810,7 @@
             </a:pPr>
             <a:r>
               <a:rPr lang="en-US" sz="1800" dirty="0"/>
-              <a:t> larger than cluster 0; which concurs with PCA analysis</a:t>
+              <a:t>Larger cluster: 81,312 properties (82% of total); concurs with PCA analysis</a:t>
             </a:r>
           </a:p>
           <a:p>
@@ -6813,7 +6830,7 @@
             </a:pPr>
             <a:r>
               <a:rPr lang="en-US" sz="1800" dirty="0"/>
-              <a:t>Rental Price: </a:t>
+              <a:t xml:space="preserve">Rental Price: </a:t>
             </a:r>
           </a:p>
           <a:p>
@@ -6823,7 +6840,7 @@
             </a:pPr>
             <a:r>
               <a:rPr lang="en-US" dirty="0"/>
-              <a:t>Average: $1,555</a:t>
+              <a:t>Average: $1,550</a:t>
             </a:r>
           </a:p>
           <a:p>
@@ -6833,7 +6850,7 @@
             </a:pPr>
             <a:r>
               <a:rPr lang="en-US" dirty="0"/>
-              <a:t>Median: $ 1,317</a:t>
+              <a:t>Median: $1,375</a:t>
             </a:r>
           </a:p>
           <a:p>
@@ -6853,7 +6870,7 @@
             </a:pPr>
             <a:r>
               <a:rPr lang="en-US" dirty="0"/>
-              <a:t>Minimum : $200             </a:t>
+              <a:t>Minimum: $100</a:t>
             </a:r>
           </a:p>
           <a:p>
@@ -6873,7 +6890,7 @@
             </a:pPr>
             <a:r>
               <a:rPr lang="en-US" dirty="0"/>
-              <a:t>Median: 843sq</a:t>
+              <a:t>Median: 905 sq</a:t>
             </a:r>
           </a:p>
           <a:p>
@@ -6883,7 +6900,7 @@
             </a:pPr>
             <a:r>
               <a:rPr lang="en-US" dirty="0"/>
-              <a:t>Maximum: 11,318 sq</a:t>
+              <a:t>Maximum: 40,000 sq</a:t>
             </a:r>
           </a:p>
           <a:p>
@@ -6893,7 +6910,7 @@
             </a:pPr>
             <a:r>
               <a:rPr lang="en-US" dirty="0"/>
-              <a:t>Minimum : 101sq            </a:t>
+              <a:t>Minimum: 101 sq</a:t>
             </a:r>
           </a:p>
           <a:p>
@@ -6933,7 +6950,7 @@
             </a:pPr>
             <a:r>
               <a:rPr lang="en-US" dirty="0"/>
-              <a:t>Minimum : 0           </a:t>
+              <a:t xml:space="preserve">Minimum : 0           </a:t>
             </a:r>
           </a:p>
           <a:p>
@@ -7027,7 +7044,7 @@
             </a:pPr>
             <a:r>
               <a:rPr lang="en-US" dirty="0"/>
-              <a:t>Minimum : 0           </a:t>
+              <a:t xml:space="preserve">Minimum : 0           </a:t>
             </a:r>
           </a:p>
           <a:p>
@@ -7047,7 +7064,7 @@
             </a:pPr>
             <a:r>
               <a:rPr lang="en-US" dirty="0"/>
-              <a:t>Median: 0</a:t>
+              <a:t>Median: 1</a:t>
             </a:r>
           </a:p>
           <a:p>
@@ -7057,7 +7074,7 @@
             </a:pPr>
             <a:r>
               <a:rPr lang="en-US" dirty="0"/>
-              <a:t>Maximum: 3</a:t>
+              <a:t>Maximum: 5</a:t>
             </a:r>
           </a:p>
           <a:p>
@@ -7067,7 +7084,7 @@
             </a:pPr>
             <a:r>
               <a:rPr lang="en-US" dirty="0"/>
-              <a:t>Minimum : 0             </a:t>
+              <a:t xml:space="preserve">Minimum : 0             </a:t>
             </a:r>
           </a:p>
           <a:p>
@@ -7097,7 +7114,7 @@
             </a:pPr>
             <a:r>
               <a:rPr lang="en-US"/>
-              <a:t>Maximum: </a:t>
+              <a:t xml:space="preserve">Maximum: </a:t>
             </a:r>
             <a:r>
               <a:rPr lang="en-US" dirty="0"/>
@@ -7111,7 +7128,7 @@
             </a:pPr>
             <a:r>
               <a:rPr lang="en-US" dirty="0"/>
-              <a:t>Minimum: 0              </a:t>
+              <a:t xml:space="preserve">Minimum: 0              </a:t>
             </a:r>
           </a:p>
           <a:p>
@@ -7175,15 +7192,15 @@
           <a:p>
             <a:r>
               <a:rPr lang="en-US" sz="3200" dirty="0"/>
-              <a:t>Results </a:t>
+              <a:t xml:space="preserve">Results </a:t>
             </a:r>
             <a:r>
               <a:rPr lang="en-US" sz="2000" dirty="0"/>
-              <a:t>cont’d    </a:t>
+              <a:t xml:space="preserve">cont’d    </a:t>
             </a:r>
             <a:r>
               <a:rPr lang="en-US" sz="3600" dirty="0"/>
-              <a:t>CLUSTER 0 ANALYSIS </a:t>
+              <a:t>Cluster 1: Amenity-Packed Rentals Analysis</a:t>
             </a:r>
           </a:p>
         </p:txBody>
@@ -7225,7 +7242,7 @@
             </a:pPr>
             <a:r>
               <a:rPr lang="en-US" sz="1800" dirty="0"/>
-              <a:t> smaller than cluster 1; which concurs with PCA analysis</a:t>
+              <a:t>Smaller cluster: 17,877 properties (18% of total); concurs with PCA analysis</a:t>
             </a:r>
           </a:p>
           <a:p>
@@ -7245,7 +7262,7 @@
             </a:pPr>
             <a:r>
               <a:rPr lang="en-US" sz="1800" dirty="0"/>
-              <a:t>Rental Price: </a:t>
+              <a:t xml:space="preserve">Rental Price: </a:t>
             </a:r>
           </a:p>
           <a:p>
@@ -7255,7 +7272,7 @@
             </a:pPr>
             <a:r>
               <a:rPr lang="en-US" dirty="0"/>
-              <a:t>Average: $1,299</a:t>
+              <a:t>Average: $1,415</a:t>
             </a:r>
           </a:p>
           <a:p>
@@ -7265,7 +7282,7 @@
             </a:pPr>
             <a:r>
               <a:rPr lang="en-US" dirty="0"/>
-              <a:t>Median: $ 1,173</a:t>
+              <a:t>Median: $1,250</a:t>
             </a:r>
           </a:p>
           <a:p>
@@ -7275,7 +7292,7 @@
             </a:pPr>
             <a:r>
               <a:rPr lang="en-US" dirty="0"/>
-              <a:t>Maximum: $11,000</a:t>
+              <a:t>Maximum: $11,500</a:t>
             </a:r>
           </a:p>
           <a:p>
@@ -7285,7 +7302,7 @@
             </a:pPr>
             <a:r>
               <a:rPr lang="en-US" dirty="0"/>
-              <a:t>Minimum : $300             </a:t>
+              <a:t>Minimum: $285</a:t>
             </a:r>
           </a:p>
           <a:p>
@@ -7305,7 +7322,7 @@
             </a:pPr>
             <a:r>
               <a:rPr lang="en-US" dirty="0"/>
-              <a:t>Median: 750sq</a:t>
+              <a:t>Median: 880 sq</a:t>
             </a:r>
           </a:p>
           <a:p>
@@ -7315,7 +7332,7 @@
             </a:pPr>
             <a:r>
               <a:rPr lang="en-US" dirty="0"/>
-              <a:t>Maximum: 40,000 sq</a:t>
+              <a:t>Maximum: 4,911 sq</a:t>
             </a:r>
           </a:p>
           <a:p>
@@ -7325,7 +7342,7 @@
             </a:pPr>
             <a:r>
               <a:rPr lang="en-US" dirty="0"/>
-              <a:t>Minimum : 130sq            </a:t>
+              <a:t>Minimum: 116 sq</a:t>
             </a:r>
           </a:p>
           <a:p>
@@ -7365,7 +7382,7 @@
             </a:pPr>
             <a:r>
               <a:rPr lang="en-US" dirty="0"/>
-              <a:t>Minimum : 0           </a:t>
+              <a:t xml:space="preserve">Minimum : 0           </a:t>
             </a:r>
           </a:p>
           <a:p>
@@ -7439,7 +7456,7 @@
             </a:pPr>
             <a:r>
               <a:rPr lang="en-US" dirty="0"/>
-              <a:t>Median: 1</a:t>
+              <a:t>Median: 2</a:t>
             </a:r>
           </a:p>
           <a:p>
@@ -7459,7 +7476,7 @@
             </a:pPr>
             <a:r>
               <a:rPr lang="en-US" dirty="0"/>
-              <a:t>Minimum : 0           </a:t>
+              <a:t xml:space="preserve">Minimum : 0           </a:t>
             </a:r>
           </a:p>
           <a:p>
@@ -7499,7 +7516,7 @@
             </a:pPr>
             <a:r>
               <a:rPr lang="en-US" dirty="0"/>
-              <a:t>Minimum : 3             </a:t>
+              <a:t xml:space="preserve">Minimum : 3             </a:t>
             </a:r>
           </a:p>
           <a:p>
@@ -7539,7 +7556,7 @@
             </a:pPr>
             <a:r>
               <a:rPr lang="en-US" dirty="0"/>
-              <a:t>Minimum: 0              </a:t>
+              <a:t xml:space="preserve">Minimum: 0              </a:t>
             </a:r>
           </a:p>
           <a:p>
@@ -7647,7 +7664,7 @@
             </a:pPr>
             <a:r>
               <a:rPr lang="en-US" dirty="0"/>
-              <a:t> spacious apartments - Cluster 1</a:t>
+              <a:t>Cluster 0 (Essential Rentals): spacious apartments with fewer amenities</a:t>
             </a:r>
           </a:p>
           <a:p>
@@ -7657,7 +7674,7 @@
             </a:pPr>
             <a:r>
               <a:rPr lang="en-US" dirty="0"/>
-              <a:t>Smaller apartments with several amenities – Cluster 0</a:t>
+              <a:t>Cluster 1 (Amenity-Packed Rentals): smaller apartments with more amenities</a:t>
             </a:r>
           </a:p>
           <a:p>
@@ -7677,7 +7694,7 @@
             </a:pPr>
             <a:r>
               <a:rPr lang="en-US" dirty="0"/>
-              <a:t>Smaller apartments are concentrated on the upper East side of the country</a:t>
+              <a:t>Cluster 1 (Amenity-Packed) properties are concentrated in the Northeast region</a:t>
             </a:r>
           </a:p>
           <a:p>
@@ -7697,7 +7714,7 @@
             </a:pPr>
             <a:r>
               <a:rPr lang="en-US" dirty="0"/>
-              <a:t>Honolulu, HI – Cluster 1</a:t>
+              <a:t>San Diego, CA – predominantly Cluster 0 (91%)</a:t>
             </a:r>
           </a:p>
           <a:p>
@@ -7707,11 +7724,11 @@
             </a:pPr>
             <a:r>
               <a:rPr lang="en-US" dirty="0"/>
-              <a:t>Madison, WI –</a:t>
+              <a:t>South Boston, MA –</a:t>
             </a:r>
             <a:r>
               <a:rPr lang="en-US" sz="2100" dirty="0"/>
-              <a:t> Cluster 0</a:t>
+              <a:t xml:space="preserve"> exclusively Cluster 1</a:t>
             </a:r>
           </a:p>
           <a:p>
@@ -7868,7 +7885,7 @@
             </a:pPr>
             <a:r>
               <a:rPr lang="en-US" dirty="0"/>
-              <a:t>Machine Learning Methods: </a:t>
+              <a:t xml:space="preserve">Machine Learning Methods: </a:t>
             </a:r>
             <a:r>
               <a:rPr lang="en-US" dirty="0" err="1"/>
@@ -7876,7 +7893,7 @@
             </a:r>
             <a:r>
               <a:rPr lang="en-US" dirty="0"/>
-              <a:t> Clustering, PCA analysis , </a:t>
+              <a:t xml:space="preserve"> Clustering, PCA analysis , </a:t>
             </a:r>
             <a:r>
               <a:rPr lang="en-US" dirty="0" err="1"/>
@@ -7884,7 +7901,7 @@
             </a:r>
             <a:r>
               <a:rPr lang="en-US" dirty="0"/>
-              <a:t> and </a:t>
+              <a:t xml:space="preserve"> and </a:t>
             </a:r>
             <a:r>
               <a:rPr lang="en-US" dirty="0" err="1"/>
@@ -7892,7 +7909,7 @@
             </a:r>
             <a:r>
               <a:rPr lang="en-US" dirty="0"/>
-              <a:t> </a:t>
+              <a:t xml:space="preserve"> </a:t>
             </a:r>
           </a:p>
           <a:p>
@@ -7902,7 +7919,7 @@
             </a:pPr>
             <a:r>
               <a:rPr lang="en-US" dirty="0"/>
-              <a:t>Methodology Analysis </a:t>
+              <a:t xml:space="preserve">Methodology Analysis </a:t>
             </a:r>
           </a:p>
           <a:p>
@@ -7922,7 +7939,7 @@
             </a:pPr>
             <a:r>
               <a:rPr lang="en-US" dirty="0"/>
-              <a:t> Q&amp;A session</a:t>
+              <a:t xml:space="preserve"> Q&amp;A session</a:t>
             </a:r>
           </a:p>
         </p:txBody>
@@ -8113,7 +8130,7 @@
           <a:p>
             <a:r>
               <a:rPr lang="en-US" dirty="0"/>
-              <a:t>Data Source </a:t>
+              <a:t xml:space="preserve">Data Source </a:t>
             </a:r>
           </a:p>
         </p:txBody>
@@ -8309,7 +8326,7 @@
           <a:p>
             <a:r>
               <a:rPr lang="en-US" dirty="0"/>
-              <a:t>Used </a:t>
+              <a:t xml:space="preserve">Used </a:t>
             </a:r>
             <a:r>
               <a:rPr lang="en-US" dirty="0" err="1"/>
@@ -8317,7 +8334,7 @@
             </a:r>
             <a:r>
               <a:rPr lang="en-US" dirty="0"/>
-              <a:t> method to scale numerical columns such as price, square feet, latitude and longitude</a:t>
+              <a:t xml:space="preserve"> method to scale numerical columns such as price, square feet, latitude and longitude</a:t>
             </a:r>
           </a:p>
           <a:p>
@@ -8499,7 +8516,7 @@
             </a:r>
             <a:r>
               <a:rPr lang="en-US" dirty="0"/>
-              <a:t> Clustering : 2 clusters identified</a:t>
+              <a:t xml:space="preserve"> Clustering : 2 clusters identified</a:t>
             </a:r>
           </a:p>
           <a:p>
@@ -8630,7 +8647,7 @@
           <a:p>
             <a:r>
               <a:rPr lang="en-US" dirty="0"/>
-              <a:t>Machine Learning Methods </a:t>
+              <a:t xml:space="preserve">Machine Learning Methods </a:t>
             </a:r>
             <a:r>
               <a:rPr lang="en-US" sz="2000" dirty="0"/>
@@ -8671,7 +8688,7 @@
             </a:pPr>
             <a:r>
               <a:rPr lang="en-US" dirty="0"/>
-              <a:t>Principal Components Analysis : </a:t>
+              <a:t xml:space="preserve">Principal Components Analysis : </a:t>
             </a:r>
             <a:r>
               <a:rPr lang="en-US" dirty="0" err="1"/>
@@ -8800,7 +8817,7 @@
           <a:p>
             <a:r>
               <a:rPr lang="en-US" dirty="0"/>
-              <a:t>Machine Learning Methods </a:t>
+              <a:t xml:space="preserve">Machine Learning Methods </a:t>
             </a:r>
             <a:r>
               <a:rPr lang="en-US" sz="2000" dirty="0"/>
@@ -8846,7 +8863,7 @@
             </a:r>
             <a:r>
               <a:rPr lang="en-US" dirty="0"/>
-              <a:t> and </a:t>
+              <a:t xml:space="preserve"> and </a:t>
             </a:r>
             <a:r>
               <a:rPr lang="en-US" dirty="0" err="1"/>
@@ -8854,7 +8871,7 @@
             </a:r>
             <a:r>
               <a:rPr lang="en-US" dirty="0"/>
-              <a:t> to determine feature importance on PCA method</a:t>
+              <a:t xml:space="preserve"> to determine feature importance on PCA method</a:t>
             </a:r>
           </a:p>
           <a:p>
@@ -8978,7 +8995,7 @@
           <a:p>
             <a:r>
               <a:rPr lang="en-US" dirty="0"/>
-              <a:t>Machine Learning Methods </a:t>
+              <a:t xml:space="preserve">Machine Learning Methods </a:t>
             </a:r>
             <a:r>
               <a:rPr lang="en-US" sz="2000" dirty="0"/>
@@ -9019,7 +9036,7 @@
             </a:r>
             <a:r>
               <a:rPr lang="en-US" dirty="0"/>
-              <a:t> and </a:t>
+              <a:t xml:space="preserve"> and </a:t>
             </a:r>
             <a:r>
               <a:rPr lang="en-US" dirty="0" err="1"/>
@@ -9027,7 +9044,7 @@
             </a:r>
             <a:r>
               <a:rPr lang="en-US" dirty="0"/>
-              <a:t> to determine feature importance on </a:t>
+              <a:t xml:space="preserve"> to determine feature importance on </a:t>
             </a:r>
             <a:r>
               <a:rPr lang="en-US" dirty="0" err="1"/>
@@ -9035,7 +9052,7 @@
             </a:r>
             <a:r>
               <a:rPr lang="en-US" dirty="0"/>
-              <a:t> method</a:t>
+              <a:t xml:space="preserve"> method</a:t>
             </a:r>
           </a:p>
           <a:p>

--- a/Analysis of Us Rental Market.pptx
+++ b/Analysis of Us Rental Market.pptx
@@ -209,7 +209,7 @@
           <a:p>
             <a:fld id="{D813B696-7300-B942-95CD-6BA9CF4A8F92}" type="datetimeFigureOut">
               <a:rPr lang="en-US" smtClean="0"/>
-              <a:t>3/2/26</a:t>
+              <a:t>3/12/26</a:t>
             </a:fld>
             <a:endParaRPr lang="en-US"/>
           </a:p>
@@ -623,7 +623,7 @@
             </a:pPr>
             <a:r>
               <a:rPr lang="en-US" dirty="0"/>
-              <a:t xml:space="preserve">Sports amenities include: </a:t>
+              <a:t>Sports amenities include: </a:t>
             </a:r>
             <a:r>
               <a:rPr lang="en-US" b="0" dirty="0">
@@ -643,7 +643,7 @@
                 <a:effectLst/>
                 <a:latin typeface="Courier New" panose="02070309020205020404" pitchFamily="49" charset="0"/>
               </a:rPr>
-              <a:t xml:space="preserve">, </a:t>
+              <a:t>, </a:t>
             </a:r>
             <a:r>
               <a:rPr lang="en-US" b="0" dirty="0">
@@ -663,7 +663,7 @@
                 <a:effectLst/>
                 <a:latin typeface="Courier New" panose="02070309020205020404" pitchFamily="49" charset="0"/>
               </a:rPr>
-              <a:t xml:space="preserve">, </a:t>
+              <a:t>, </a:t>
             </a:r>
             <a:r>
               <a:rPr lang="en-US" b="0" dirty="0">
@@ -683,7 +683,7 @@
                 <a:effectLst/>
                 <a:latin typeface="Courier New" panose="02070309020205020404" pitchFamily="49" charset="0"/>
               </a:rPr>
-              <a:t xml:space="preserve">, </a:t>
+              <a:t>, </a:t>
             </a:r>
             <a:r>
               <a:rPr lang="en-US" b="0" dirty="0">
@@ -703,7 +703,7 @@
                 <a:effectLst/>
                 <a:latin typeface="Courier New" panose="02070309020205020404" pitchFamily="49" charset="0"/>
               </a:rPr>
-              <a:t xml:space="preserve">, </a:t>
+              <a:t>, </a:t>
             </a:r>
             <a:r>
               <a:rPr lang="en-US" b="0" dirty="0">
@@ -752,7 +752,7 @@
                 <a:effectLst/>
                 <a:latin typeface="Courier New" panose="02070309020205020404" pitchFamily="49" charset="0"/>
               </a:rPr>
-              <a:t xml:space="preserve">, </a:t>
+              <a:t>, </a:t>
             </a:r>
             <a:r>
               <a:rPr lang="en-US" b="0" dirty="0">
@@ -772,7 +772,7 @@
                 <a:effectLst/>
                 <a:latin typeface="Courier New" panose="02070309020205020404" pitchFamily="49" charset="0"/>
               </a:rPr>
-              <a:t xml:space="preserve">, </a:t>
+              <a:t>, </a:t>
             </a:r>
             <a:r>
               <a:rPr lang="en-US" b="0" dirty="0">
@@ -811,7 +811,7 @@
                 <a:effectLst/>
                 <a:latin typeface="Courier New" panose="02070309020205020404" pitchFamily="49" charset="0"/>
               </a:rPr>
-              <a:t xml:space="preserve">Convenience </a:t>
+              <a:t>Convenience </a:t>
             </a:r>
             <a:r>
               <a:rPr lang="en-US" b="0" dirty="0">
@@ -831,7 +831,7 @@
                 <a:effectLst/>
                 <a:latin typeface="Courier New" panose="02070309020205020404" pitchFamily="49" charset="0"/>
               </a:rPr>
-              <a:t xml:space="preserve">, </a:t>
+              <a:t>, </a:t>
             </a:r>
             <a:r>
               <a:rPr lang="en-US" b="0" dirty="0">
@@ -851,7 +851,7 @@
                 <a:effectLst/>
                 <a:latin typeface="Courier New" panose="02070309020205020404" pitchFamily="49" charset="0"/>
               </a:rPr>
-              <a:t xml:space="preserve">, </a:t>
+              <a:t>, </a:t>
             </a:r>
             <a:r>
               <a:rPr lang="en-US" b="0" dirty="0">
@@ -871,7 +871,7 @@
                 <a:effectLst/>
                 <a:latin typeface="Courier New" panose="02070309020205020404" pitchFamily="49" charset="0"/>
               </a:rPr>
-              <a:t xml:space="preserve">, </a:t>
+              <a:t>, </a:t>
             </a:r>
             <a:r>
               <a:rPr lang="en-US" b="0" dirty="0">
@@ -891,7 +891,7 @@
                 <a:effectLst/>
                 <a:latin typeface="Courier New" panose="02070309020205020404" pitchFamily="49" charset="0"/>
               </a:rPr>
-              <a:t xml:space="preserve">, </a:t>
+              <a:t>, </a:t>
             </a:r>
             <a:r>
               <a:rPr lang="en-US" b="0" dirty="0">
@@ -911,7 +911,7 @@
                 <a:effectLst/>
                 <a:latin typeface="Courier New" panose="02070309020205020404" pitchFamily="49" charset="0"/>
               </a:rPr>
-              <a:t xml:space="preserve">, </a:t>
+              <a:t>, </a:t>
             </a:r>
             <a:r>
               <a:rPr lang="en-US" b="0" dirty="0">
@@ -931,7 +931,7 @@
                 <a:effectLst/>
                 <a:latin typeface="Courier New" panose="02070309020205020404" pitchFamily="49" charset="0"/>
               </a:rPr>
-              <a:t xml:space="preserve">, </a:t>
+              <a:t>, </a:t>
             </a:r>
             <a:r>
               <a:rPr lang="en-US" b="0" dirty="0">
@@ -951,7 +951,7 @@
                 <a:effectLst/>
                 <a:latin typeface="Courier New" panose="02070309020205020404" pitchFamily="49" charset="0"/>
               </a:rPr>
-              <a:t xml:space="preserve">, </a:t>
+              <a:t>, </a:t>
             </a:r>
             <a:r>
               <a:rPr lang="en-US" b="0" dirty="0">
@@ -971,7 +971,7 @@
                 <a:effectLst/>
                 <a:latin typeface="Courier New" panose="02070309020205020404" pitchFamily="49" charset="0"/>
               </a:rPr>
-              <a:t xml:space="preserve">, </a:t>
+              <a:t>, </a:t>
             </a:r>
             <a:r>
               <a:rPr lang="en-US" b="0" dirty="0" err="1">
@@ -1011,7 +1011,7 @@
                 <a:effectLst/>
                 <a:latin typeface="Courier New" panose="02070309020205020404" pitchFamily="49" charset="0"/>
               </a:rPr>
-              <a:t xml:space="preserve"> or </a:t>
+              <a:t> or </a:t>
             </a:r>
             <a:r>
               <a:rPr lang="en-US" b="0" dirty="0" err="1">
@@ -1051,7 +1051,7 @@
                 <a:effectLst/>
                 <a:latin typeface="Courier New" panose="02070309020205020404" pitchFamily="49" charset="0"/>
               </a:rPr>
-              <a:t xml:space="preserve"> Access</a:t>
+              <a:t> Access</a:t>
             </a:r>
           </a:p>
           <a:p>
@@ -1090,7 +1090,7 @@
                 <a:effectLst/>
                 <a:latin typeface="Courier New" panose="02070309020205020404" pitchFamily="49" charset="0"/>
               </a:rPr>
-              <a:t xml:space="preserve">, </a:t>
+              <a:t>, </a:t>
             </a:r>
             <a:r>
               <a:rPr lang="en-US" b="0" dirty="0">
@@ -1110,7 +1110,7 @@
                 <a:effectLst/>
                 <a:latin typeface="Courier New" panose="02070309020205020404" pitchFamily="49" charset="0"/>
               </a:rPr>
-              <a:t xml:space="preserve">, </a:t>
+              <a:t>, </a:t>
             </a:r>
             <a:r>
               <a:rPr lang="en-US" b="0" dirty="0">
@@ -1130,7 +1130,7 @@
                 <a:effectLst/>
                 <a:latin typeface="Courier New" panose="02070309020205020404" pitchFamily="49" charset="0"/>
               </a:rPr>
-              <a:t xml:space="preserve">, </a:t>
+              <a:t>, </a:t>
             </a:r>
             <a:r>
               <a:rPr lang="en-US" b="0" dirty="0">
@@ -1150,7 +1150,7 @@
                 <a:effectLst/>
                 <a:latin typeface="Courier New" panose="02070309020205020404" pitchFamily="49" charset="0"/>
               </a:rPr>
-              <a:t xml:space="preserve">, </a:t>
+              <a:t>, </a:t>
             </a:r>
             <a:r>
               <a:rPr lang="en-US" b="0" dirty="0">
@@ -1170,7 +1170,7 @@
                 <a:effectLst/>
                 <a:latin typeface="Courier New" panose="02070309020205020404" pitchFamily="49" charset="0"/>
               </a:rPr>
-              <a:t xml:space="preserve">, </a:t>
+              <a:t>, </a:t>
             </a:r>
             <a:r>
               <a:rPr lang="en-US" b="0" dirty="0">
@@ -1424,7 +1424,7 @@
             </a:pPr>
             <a:r>
               <a:rPr lang="en-US" dirty="0"/>
-              <a:t xml:space="preserve">Sports amenities include: </a:t>
+              <a:t>Sports amenities include: </a:t>
             </a:r>
             <a:r>
               <a:rPr lang="en-US" b="0" dirty="0">
@@ -1444,7 +1444,7 @@
                 <a:effectLst/>
                 <a:latin typeface="Courier New" panose="02070309020205020404" pitchFamily="49" charset="0"/>
               </a:rPr>
-              <a:t xml:space="preserve">, </a:t>
+              <a:t>, </a:t>
             </a:r>
             <a:r>
               <a:rPr lang="en-US" b="0" dirty="0">
@@ -1464,7 +1464,7 @@
                 <a:effectLst/>
                 <a:latin typeface="Courier New" panose="02070309020205020404" pitchFamily="49" charset="0"/>
               </a:rPr>
-              <a:t xml:space="preserve">, </a:t>
+              <a:t>, </a:t>
             </a:r>
             <a:r>
               <a:rPr lang="en-US" b="0" dirty="0">
@@ -1484,7 +1484,7 @@
                 <a:effectLst/>
                 <a:latin typeface="Courier New" panose="02070309020205020404" pitchFamily="49" charset="0"/>
               </a:rPr>
-              <a:t xml:space="preserve">, </a:t>
+              <a:t>, </a:t>
             </a:r>
             <a:r>
               <a:rPr lang="en-US" b="0" dirty="0">
@@ -1504,7 +1504,7 @@
                 <a:effectLst/>
                 <a:latin typeface="Courier New" panose="02070309020205020404" pitchFamily="49" charset="0"/>
               </a:rPr>
-              <a:t xml:space="preserve">, </a:t>
+              <a:t>, </a:t>
             </a:r>
             <a:r>
               <a:rPr lang="en-US" b="0" dirty="0">
@@ -1553,7 +1553,7 @@
                 <a:effectLst/>
                 <a:latin typeface="Courier New" panose="02070309020205020404" pitchFamily="49" charset="0"/>
               </a:rPr>
-              <a:t xml:space="preserve">, </a:t>
+              <a:t>, </a:t>
             </a:r>
             <a:r>
               <a:rPr lang="en-US" b="0" dirty="0">
@@ -1573,7 +1573,7 @@
                 <a:effectLst/>
                 <a:latin typeface="Courier New" panose="02070309020205020404" pitchFamily="49" charset="0"/>
               </a:rPr>
-              <a:t xml:space="preserve">, </a:t>
+              <a:t>, </a:t>
             </a:r>
             <a:r>
               <a:rPr lang="en-US" b="0" dirty="0">
@@ -1612,7 +1612,7 @@
                 <a:effectLst/>
                 <a:latin typeface="Courier New" panose="02070309020205020404" pitchFamily="49" charset="0"/>
               </a:rPr>
-              <a:t xml:space="preserve">Convenience </a:t>
+              <a:t>Convenience </a:t>
             </a:r>
             <a:r>
               <a:rPr lang="en-US" b="0" dirty="0">
@@ -1632,7 +1632,7 @@
                 <a:effectLst/>
                 <a:latin typeface="Courier New" panose="02070309020205020404" pitchFamily="49" charset="0"/>
               </a:rPr>
-              <a:t xml:space="preserve">, </a:t>
+              <a:t>, </a:t>
             </a:r>
             <a:r>
               <a:rPr lang="en-US" b="0" dirty="0">
@@ -1652,7 +1652,7 @@
                 <a:effectLst/>
                 <a:latin typeface="Courier New" panose="02070309020205020404" pitchFamily="49" charset="0"/>
               </a:rPr>
-              <a:t xml:space="preserve">, </a:t>
+              <a:t>, </a:t>
             </a:r>
             <a:r>
               <a:rPr lang="en-US" b="0" dirty="0">
@@ -1672,7 +1672,7 @@
                 <a:effectLst/>
                 <a:latin typeface="Courier New" panose="02070309020205020404" pitchFamily="49" charset="0"/>
               </a:rPr>
-              <a:t xml:space="preserve">, </a:t>
+              <a:t>, </a:t>
             </a:r>
             <a:r>
               <a:rPr lang="en-US" b="0" dirty="0">
@@ -1692,7 +1692,7 @@
                 <a:effectLst/>
                 <a:latin typeface="Courier New" panose="02070309020205020404" pitchFamily="49" charset="0"/>
               </a:rPr>
-              <a:t xml:space="preserve">, </a:t>
+              <a:t>, </a:t>
             </a:r>
             <a:r>
               <a:rPr lang="en-US" b="0" dirty="0">
@@ -1712,7 +1712,7 @@
                 <a:effectLst/>
                 <a:latin typeface="Courier New" panose="02070309020205020404" pitchFamily="49" charset="0"/>
               </a:rPr>
-              <a:t xml:space="preserve">, </a:t>
+              <a:t>, </a:t>
             </a:r>
             <a:r>
               <a:rPr lang="en-US" b="0" dirty="0">
@@ -1732,7 +1732,7 @@
                 <a:effectLst/>
                 <a:latin typeface="Courier New" panose="02070309020205020404" pitchFamily="49" charset="0"/>
               </a:rPr>
-              <a:t xml:space="preserve">, </a:t>
+              <a:t>, </a:t>
             </a:r>
             <a:r>
               <a:rPr lang="en-US" b="0" dirty="0">
@@ -1752,7 +1752,7 @@
                 <a:effectLst/>
                 <a:latin typeface="Courier New" panose="02070309020205020404" pitchFamily="49" charset="0"/>
               </a:rPr>
-              <a:t xml:space="preserve">, </a:t>
+              <a:t>, </a:t>
             </a:r>
             <a:r>
               <a:rPr lang="en-US" b="0" dirty="0">
@@ -1772,7 +1772,7 @@
                 <a:effectLst/>
                 <a:latin typeface="Courier New" panose="02070309020205020404" pitchFamily="49" charset="0"/>
               </a:rPr>
-              <a:t xml:space="preserve">, </a:t>
+              <a:t>, </a:t>
             </a:r>
             <a:r>
               <a:rPr lang="en-US" b="0" dirty="0" err="1">
@@ -1812,7 +1812,7 @@
                 <a:effectLst/>
                 <a:latin typeface="Courier New" panose="02070309020205020404" pitchFamily="49" charset="0"/>
               </a:rPr>
-              <a:t xml:space="preserve"> or </a:t>
+              <a:t> or </a:t>
             </a:r>
             <a:r>
               <a:rPr lang="en-US" b="0" dirty="0" err="1">
@@ -1852,7 +1852,7 @@
                 <a:effectLst/>
                 <a:latin typeface="Courier New" panose="02070309020205020404" pitchFamily="49" charset="0"/>
               </a:rPr>
-              <a:t xml:space="preserve"> Access</a:t>
+              <a:t> Access</a:t>
             </a:r>
           </a:p>
           <a:p>
@@ -1891,7 +1891,7 @@
                 <a:effectLst/>
                 <a:latin typeface="Courier New" panose="02070309020205020404" pitchFamily="49" charset="0"/>
               </a:rPr>
-              <a:t xml:space="preserve">, </a:t>
+              <a:t>, </a:t>
             </a:r>
             <a:r>
               <a:rPr lang="en-US" b="0" dirty="0">
@@ -1911,7 +1911,7 @@
                 <a:effectLst/>
                 <a:latin typeface="Courier New" panose="02070309020205020404" pitchFamily="49" charset="0"/>
               </a:rPr>
-              <a:t xml:space="preserve">, </a:t>
+              <a:t>, </a:t>
             </a:r>
             <a:r>
               <a:rPr lang="en-US" b="0" dirty="0">
@@ -1931,7 +1931,7 @@
                 <a:effectLst/>
                 <a:latin typeface="Courier New" panose="02070309020205020404" pitchFamily="49" charset="0"/>
               </a:rPr>
-              <a:t xml:space="preserve">, </a:t>
+              <a:t>, </a:t>
             </a:r>
             <a:r>
               <a:rPr lang="en-US" b="0" dirty="0">
@@ -1951,7 +1951,7 @@
                 <a:effectLst/>
                 <a:latin typeface="Courier New" panose="02070309020205020404" pitchFamily="49" charset="0"/>
               </a:rPr>
-              <a:t xml:space="preserve">, </a:t>
+              <a:t>, </a:t>
             </a:r>
             <a:r>
               <a:rPr lang="en-US" b="0" dirty="0">
@@ -1971,7 +1971,7 @@
                 <a:effectLst/>
                 <a:latin typeface="Courier New" panose="02070309020205020404" pitchFamily="49" charset="0"/>
               </a:rPr>
-              <a:t xml:space="preserve">, </a:t>
+              <a:t>, </a:t>
             </a:r>
             <a:r>
               <a:rPr lang="en-US" b="0" dirty="0">
@@ -2301,7 +2301,7 @@
           <a:p>
             <a:fld id="{0CC58D2E-84BF-0A44-9057-4674209F9D8F}" type="datetimeFigureOut">
               <a:rPr lang="en-US" smtClean="0"/>
-              <a:t>3/2/26</a:t>
+              <a:t>3/12/26</a:t>
             </a:fld>
             <a:endParaRPr lang="en-US"/>
           </a:p>
@@ -2512,7 +2512,7 @@
           <a:p>
             <a:fld id="{0CC58D2E-84BF-0A44-9057-4674209F9D8F}" type="datetimeFigureOut">
               <a:rPr lang="en-US" smtClean="0"/>
-              <a:t>3/2/26</a:t>
+              <a:t>3/12/26</a:t>
             </a:fld>
             <a:endParaRPr lang="en-US"/>
           </a:p>
@@ -2727,7 +2727,7 @@
           <a:p>
             <a:fld id="{0CC58D2E-84BF-0A44-9057-4674209F9D8F}" type="datetimeFigureOut">
               <a:rPr lang="en-US" smtClean="0"/>
-              <a:t>3/2/26</a:t>
+              <a:t>3/12/26</a:t>
             </a:fld>
             <a:endParaRPr lang="en-US"/>
           </a:p>
@@ -2928,7 +2928,7 @@
           <a:p>
             <a:fld id="{0CC58D2E-84BF-0A44-9057-4674209F9D8F}" type="datetimeFigureOut">
               <a:rPr lang="en-US" smtClean="0"/>
-              <a:t>3/2/26</a:t>
+              <a:t>3/12/26</a:t>
             </a:fld>
             <a:endParaRPr lang="en-US"/>
           </a:p>
@@ -3207,7 +3207,7 @@
           <a:p>
             <a:fld id="{0CC58D2E-84BF-0A44-9057-4674209F9D8F}" type="datetimeFigureOut">
               <a:rPr lang="en-US" smtClean="0"/>
-              <a:t>3/2/26</a:t>
+              <a:t>3/12/26</a:t>
             </a:fld>
             <a:endParaRPr lang="en-US"/>
           </a:p>
@@ -3475,7 +3475,7 @@
           <a:p>
             <a:fld id="{0CC58D2E-84BF-0A44-9057-4674209F9D8F}" type="datetimeFigureOut">
               <a:rPr lang="en-US" smtClean="0"/>
-              <a:t>3/2/26</a:t>
+              <a:t>3/12/26</a:t>
             </a:fld>
             <a:endParaRPr lang="en-US"/>
           </a:p>
@@ -3891,7 +3891,7 @@
           <a:p>
             <a:fld id="{0CC58D2E-84BF-0A44-9057-4674209F9D8F}" type="datetimeFigureOut">
               <a:rPr lang="en-US" smtClean="0"/>
-              <a:t>3/2/26</a:t>
+              <a:t>3/12/26</a:t>
             </a:fld>
             <a:endParaRPr lang="en-US"/>
           </a:p>
@@ -4040,7 +4040,7 @@
           <a:p>
             <a:fld id="{0CC58D2E-84BF-0A44-9057-4674209F9D8F}" type="datetimeFigureOut">
               <a:rPr lang="en-US" smtClean="0"/>
-              <a:t>3/2/26</a:t>
+              <a:t>3/12/26</a:t>
             </a:fld>
             <a:endParaRPr lang="en-US"/>
           </a:p>
@@ -4166,7 +4166,7 @@
           <a:p>
             <a:fld id="{0CC58D2E-84BF-0A44-9057-4674209F9D8F}" type="datetimeFigureOut">
               <a:rPr lang="en-US" smtClean="0"/>
-              <a:t>3/2/26</a:t>
+              <a:t>3/12/26</a:t>
             </a:fld>
             <a:endParaRPr lang="en-US"/>
           </a:p>
@@ -4417,7 +4417,7 @@
           <a:p>
             <a:fld id="{0CC58D2E-84BF-0A44-9057-4674209F9D8F}" type="datetimeFigureOut">
               <a:rPr lang="en-US" smtClean="0"/>
-              <a:t>3/2/26</a:t>
+              <a:t>3/12/26</a:t>
             </a:fld>
             <a:endParaRPr lang="en-US"/>
           </a:p>
@@ -4862,7 +4862,7 @@
           <a:p>
             <a:fld id="{0CC58D2E-84BF-0A44-9057-4674209F9D8F}" type="datetimeFigureOut">
               <a:rPr lang="en-US" smtClean="0"/>
-              <a:t>3/2/26</a:t>
+              <a:t>3/12/26</a:t>
             </a:fld>
             <a:endParaRPr lang="en-US"/>
           </a:p>
@@ -5196,7 +5196,7 @@
           <a:p>
             <a:fld id="{0CC58D2E-84BF-0A44-9057-4674209F9D8F}" type="datetimeFigureOut">
               <a:rPr lang="en-US" smtClean="0"/>
-              <a:t>3/2/26</a:t>
+              <a:t>3/12/26</a:t>
             </a:fld>
             <a:endParaRPr lang="en-US"/>
           </a:p>
@@ -5712,7 +5712,7 @@
           <a:p>
             <a:r>
               <a:rPr lang="en-US" sz="3200" dirty="0"/>
-              <a:t xml:space="preserve"> Analysis of the U.S. Apartment Rental Market: Identifying Key Segments and Characteristics</a:t>
+              <a:t> Analysis of the U.S. Apartment Rental Market: Identifying Key Segments and Characteristics</a:t>
             </a:r>
           </a:p>
         </p:txBody>
@@ -6228,15 +6228,7 @@
             </a:pPr>
             <a:r>
               <a:rPr lang="en-US" sz="1600" cap="all" dirty="0"/>
-              <a:t>https://ellac12345.github.io/</a:t>
-            </a:r>
-            <a:r>
-              <a:rPr lang="en-US" sz="1600" cap="all"/>
-              <a:t>US_Rental_Market</a:t>
-            </a:r>
-            <a:r>
-              <a:rPr lang="en-US" sz="1600" cap="all" dirty="0"/>
-              <a:t>/</a:t>
+              <a:t>https://ellan12-us-rental-market-srcapp-ujvkpx.streamlit.app/</a:t>
             </a:r>
           </a:p>
         </p:txBody>
@@ -6755,16 +6747,18 @@
         </p:nvSpPr>
         <p:spPr/>
         <p:txBody>
-          <a:bodyPr/>
+          <a:bodyPr>
+            <a:normAutofit fontScale="90000"/>
+          </a:bodyPr>
           <a:lstStyle/>
           <a:p>
             <a:r>
               <a:rPr lang="en-US" sz="3200" dirty="0"/>
-              <a:t xml:space="preserve">Results </a:t>
+              <a:t>Results </a:t>
             </a:r>
             <a:r>
               <a:rPr lang="en-US" sz="2000" dirty="0"/>
-              <a:t xml:space="preserve">cont’d :   </a:t>
+              <a:t>cont’d :   </a:t>
             </a:r>
             <a:r>
               <a:rPr lang="en-US" sz="3600" dirty="0"/>
@@ -6830,7 +6824,7 @@
             </a:pPr>
             <a:r>
               <a:rPr lang="en-US" sz="1800" dirty="0"/>
-              <a:t xml:space="preserve">Rental Price: </a:t>
+              <a:t>Rental Price: </a:t>
             </a:r>
           </a:p>
           <a:p>
@@ -6950,7 +6944,7 @@
             </a:pPr>
             <a:r>
               <a:rPr lang="en-US" dirty="0"/>
-              <a:t xml:space="preserve">Minimum : 0           </a:t>
+              <a:t>Minimum : 0           </a:t>
             </a:r>
           </a:p>
           <a:p>
@@ -7044,7 +7038,7 @@
             </a:pPr>
             <a:r>
               <a:rPr lang="en-US" dirty="0"/>
-              <a:t xml:space="preserve">Minimum : 0           </a:t>
+              <a:t>Minimum : 0           </a:t>
             </a:r>
           </a:p>
           <a:p>
@@ -7084,7 +7078,7 @@
             </a:pPr>
             <a:r>
               <a:rPr lang="en-US" dirty="0"/>
-              <a:t xml:space="preserve">Minimum : 0             </a:t>
+              <a:t>Minimum : 0             </a:t>
             </a:r>
           </a:p>
           <a:p>
@@ -7114,7 +7108,7 @@
             </a:pPr>
             <a:r>
               <a:rPr lang="en-US"/>
-              <a:t xml:space="preserve">Maximum: </a:t>
+              <a:t>Maximum: </a:t>
             </a:r>
             <a:r>
               <a:rPr lang="en-US" dirty="0"/>
@@ -7128,7 +7122,7 @@
             </a:pPr>
             <a:r>
               <a:rPr lang="en-US" dirty="0"/>
-              <a:t xml:space="preserve">Minimum: 0              </a:t>
+              <a:t>Minimum: 0              </a:t>
             </a:r>
           </a:p>
           <a:p>
@@ -7187,16 +7181,18 @@
         </p:nvSpPr>
         <p:spPr/>
         <p:txBody>
-          <a:bodyPr/>
+          <a:bodyPr>
+            <a:normAutofit fontScale="90000"/>
+          </a:bodyPr>
           <a:lstStyle/>
           <a:p>
             <a:r>
               <a:rPr lang="en-US" sz="3200" dirty="0"/>
-              <a:t xml:space="preserve">Results </a:t>
+              <a:t>Results </a:t>
             </a:r>
             <a:r>
               <a:rPr lang="en-US" sz="2000" dirty="0"/>
-              <a:t xml:space="preserve">cont’d    </a:t>
+              <a:t>cont’d    </a:t>
             </a:r>
             <a:r>
               <a:rPr lang="en-US" sz="3600" dirty="0"/>
@@ -7262,7 +7258,7 @@
             </a:pPr>
             <a:r>
               <a:rPr lang="en-US" sz="1800" dirty="0"/>
-              <a:t xml:space="preserve">Rental Price: </a:t>
+              <a:t>Rental Price: </a:t>
             </a:r>
           </a:p>
           <a:p>
@@ -7382,7 +7378,7 @@
             </a:pPr>
             <a:r>
               <a:rPr lang="en-US" dirty="0"/>
-              <a:t xml:space="preserve">Minimum : 0           </a:t>
+              <a:t>Minimum : 0           </a:t>
             </a:r>
           </a:p>
           <a:p>
@@ -7476,7 +7472,7 @@
             </a:pPr>
             <a:r>
               <a:rPr lang="en-US" dirty="0"/>
-              <a:t xml:space="preserve">Minimum : 0           </a:t>
+              <a:t>Minimum : 0           </a:t>
             </a:r>
           </a:p>
           <a:p>
@@ -7516,7 +7512,7 @@
             </a:pPr>
             <a:r>
               <a:rPr lang="en-US" dirty="0"/>
-              <a:t xml:space="preserve">Minimum : 3             </a:t>
+              <a:t>Minimum : 3             </a:t>
             </a:r>
           </a:p>
           <a:p>
@@ -7556,7 +7552,7 @@
             </a:pPr>
             <a:r>
               <a:rPr lang="en-US" dirty="0"/>
-              <a:t xml:space="preserve">Minimum: 0              </a:t>
+              <a:t>Minimum: 0              </a:t>
             </a:r>
           </a:p>
           <a:p>
@@ -7728,7 +7724,7 @@
             </a:r>
             <a:r>
               <a:rPr lang="en-US" sz="2100" dirty="0"/>
-              <a:t xml:space="preserve"> exclusively Cluster 1</a:t>
+              <a:t> exclusively Cluster 1</a:t>
             </a:r>
           </a:p>
           <a:p>
@@ -7885,7 +7881,7 @@
             </a:pPr>
             <a:r>
               <a:rPr lang="en-US" dirty="0"/>
-              <a:t xml:space="preserve">Machine Learning Methods: </a:t>
+              <a:t>Machine Learning Methods: </a:t>
             </a:r>
             <a:r>
               <a:rPr lang="en-US" dirty="0" err="1"/>
@@ -7893,7 +7889,7 @@
             </a:r>
             <a:r>
               <a:rPr lang="en-US" dirty="0"/>
-              <a:t xml:space="preserve"> Clustering, PCA analysis , </a:t>
+              <a:t> Clustering, PCA analysis , </a:t>
             </a:r>
             <a:r>
               <a:rPr lang="en-US" dirty="0" err="1"/>
@@ -7901,7 +7897,7 @@
             </a:r>
             <a:r>
               <a:rPr lang="en-US" dirty="0"/>
-              <a:t xml:space="preserve"> and </a:t>
+              <a:t> and </a:t>
             </a:r>
             <a:r>
               <a:rPr lang="en-US" dirty="0" err="1"/>
@@ -7909,7 +7905,7 @@
             </a:r>
             <a:r>
               <a:rPr lang="en-US" dirty="0"/>
-              <a:t xml:space="preserve"> </a:t>
+              <a:t> </a:t>
             </a:r>
           </a:p>
           <a:p>
@@ -7919,7 +7915,7 @@
             </a:pPr>
             <a:r>
               <a:rPr lang="en-US" dirty="0"/>
-              <a:t xml:space="preserve">Methodology Analysis </a:t>
+              <a:t>Methodology Analysis </a:t>
             </a:r>
           </a:p>
           <a:p>
@@ -7939,7 +7935,7 @@
             </a:pPr>
             <a:r>
               <a:rPr lang="en-US" dirty="0"/>
-              <a:t xml:space="preserve"> Q&amp;A session</a:t>
+              <a:t> Q&amp;A session</a:t>
             </a:r>
           </a:p>
         </p:txBody>
@@ -8130,7 +8126,7 @@
           <a:p>
             <a:r>
               <a:rPr lang="en-US" dirty="0"/>
-              <a:t xml:space="preserve">Data Source </a:t>
+              <a:t>Data Source </a:t>
             </a:r>
           </a:p>
         </p:txBody>
@@ -8326,7 +8322,7 @@
           <a:p>
             <a:r>
               <a:rPr lang="en-US" dirty="0"/>
-              <a:t xml:space="preserve">Used </a:t>
+              <a:t>Used </a:t>
             </a:r>
             <a:r>
               <a:rPr lang="en-US" dirty="0" err="1"/>
@@ -8334,7 +8330,7 @@
             </a:r>
             <a:r>
               <a:rPr lang="en-US" dirty="0"/>
-              <a:t xml:space="preserve"> method to scale numerical columns such as price, square feet, latitude and longitude</a:t>
+              <a:t> method to scale numerical columns such as price, square feet, latitude and longitude</a:t>
             </a:r>
           </a:p>
           <a:p>
@@ -8516,7 +8512,7 @@
             </a:r>
             <a:r>
               <a:rPr lang="en-US" dirty="0"/>
-              <a:t xml:space="preserve"> Clustering : 2 clusters identified</a:t>
+              <a:t> Clustering : 2 clusters identified</a:t>
             </a:r>
           </a:p>
           <a:p>
@@ -8647,7 +8643,7 @@
           <a:p>
             <a:r>
               <a:rPr lang="en-US" dirty="0"/>
-              <a:t xml:space="preserve">Machine Learning Methods </a:t>
+              <a:t>Machine Learning Methods </a:t>
             </a:r>
             <a:r>
               <a:rPr lang="en-US" sz="2000" dirty="0"/>
@@ -8688,7 +8684,7 @@
             </a:pPr>
             <a:r>
               <a:rPr lang="en-US" dirty="0"/>
-              <a:t xml:space="preserve">Principal Components Analysis : </a:t>
+              <a:t>Principal Components Analysis : </a:t>
             </a:r>
             <a:r>
               <a:rPr lang="en-US" dirty="0" err="1"/>
@@ -8817,7 +8813,7 @@
           <a:p>
             <a:r>
               <a:rPr lang="en-US" dirty="0"/>
-              <a:t xml:space="preserve">Machine Learning Methods </a:t>
+              <a:t>Machine Learning Methods </a:t>
             </a:r>
             <a:r>
               <a:rPr lang="en-US" sz="2000" dirty="0"/>
@@ -8863,7 +8859,7 @@
             </a:r>
             <a:r>
               <a:rPr lang="en-US" dirty="0"/>
-              <a:t xml:space="preserve"> and </a:t>
+              <a:t> and </a:t>
             </a:r>
             <a:r>
               <a:rPr lang="en-US" dirty="0" err="1"/>
@@ -8871,7 +8867,7 @@
             </a:r>
             <a:r>
               <a:rPr lang="en-US" dirty="0"/>
-              <a:t xml:space="preserve"> to determine feature importance on PCA method</a:t>
+              <a:t> to determine feature importance on PCA method</a:t>
             </a:r>
           </a:p>
           <a:p>
@@ -8995,7 +8991,7 @@
           <a:p>
             <a:r>
               <a:rPr lang="en-US" dirty="0"/>
-              <a:t xml:space="preserve">Machine Learning Methods </a:t>
+              <a:t>Machine Learning Methods </a:t>
             </a:r>
             <a:r>
               <a:rPr lang="en-US" sz="2000" dirty="0"/>
@@ -9036,7 +9032,7 @@
             </a:r>
             <a:r>
               <a:rPr lang="en-US" dirty="0"/>
-              <a:t xml:space="preserve"> and </a:t>
+              <a:t> and </a:t>
             </a:r>
             <a:r>
               <a:rPr lang="en-US" dirty="0" err="1"/>
@@ -9044,7 +9040,7 @@
             </a:r>
             <a:r>
               <a:rPr lang="en-US" dirty="0"/>
-              <a:t xml:space="preserve"> to determine feature importance on </a:t>
+              <a:t> to determine feature importance on </a:t>
             </a:r>
             <a:r>
               <a:rPr lang="en-US" dirty="0" err="1"/>
@@ -9052,7 +9048,7 @@
             </a:r>
             <a:r>
               <a:rPr lang="en-US" dirty="0"/>
-              <a:t xml:space="preserve"> method</a:t>
+              <a:t> method</a:t>
             </a:r>
           </a:p>
           <a:p>
